--- a/templates/t2_gakkyu_rule.pptx
+++ b/templates/t2_gakkyu_rule.pptx
@@ -3976,7 +3976,7 @@
                 </a:solidFill>
                 <a:latin typeface="BIZ UDPゴシック"/>
               </a:rPr>
-              <a:t>2学期、はじめます。</a:t>
+              <a:t>2学期 はじめます</a:t>
             </a:r>
           </a:p>
         </p:txBody>
@@ -4163,7 +4163,7 @@
                 </a:solidFill>
                 <a:latin typeface="BIZ UDPゴシック"/>
               </a:rPr>
-              <a:t>なさい。</a:t>
+              <a:t>なさい</a:t>
             </a:r>
           </a:p>
         </p:txBody>
@@ -4350,7 +4350,7 @@
                 </a:solidFill>
                 <a:latin typeface="BIZ UDPゴシック"/>
               </a:rPr>
-              <a:t>れい：チャイムの前に、すわる。</a:t>
+              <a:t>れい：チャイムの前に すわる</a:t>
             </a:r>
           </a:p>
         </p:txBody>
@@ -4576,7 +4576,7 @@
                 </a:solidFill>
                 <a:latin typeface="BIZ UDPゴシック"/>
               </a:rPr>
-              <a:t>れい：話している人の ほうを 見る。</a:t>
+              <a:t>れい：話している人の ほうを 見る</a:t>
             </a:r>
           </a:p>
         </p:txBody>
@@ -4802,7 +4802,7 @@
                 </a:solidFill>
                 <a:latin typeface="BIZ UDPゴシック"/>
               </a:rPr>
-              <a:t>れい：タブレットは 先生の あいずで。</a:t>
+              <a:t>れい：タブレットは 先生の あいずで</a:t>
             </a:r>
           </a:p>
         </p:txBody>
@@ -4906,7 +4906,7 @@
                 </a:solidFill>
                 <a:latin typeface="BIZ UDPゴシック"/>
               </a:rPr>
-              <a:t>なんで、この3つ なんだっけ？</a:t>
+              <a:t>なんで この3つ なんだっけ？</a:t>
             </a:r>
           </a:p>
         </p:txBody>
